--- a/Foundation_F5/Workshop/F5-W03_Apply_Workshop_L05-L06_Dinner_at_the_Lebanese_Restaurant.pptx
+++ b/Foundation_F5/Workshop/F5-W03_Apply_Workshop_L05-L06_Dinner_at_the_Lebanese_Restaurant.pptx
@@ -7436,7 +7436,7 @@
                 <a:latin typeface="Calibri" pitchFamily="34" charset="0"/>
                 <a:cs typeface="Amiri" pitchFamily="2" charset="-78"/>
               </a:rPr>
-              <a:t>Odd numbers come from F5-L05, even numbers from F5-L06. Core: a full sentence from the starter. Develop: add the “more” part. Stretch: link two answers with </a:t>
+              <a:t>Odd numbers come from F5-L05, even numbers from F5-L06. Core: a full sentence from the starter. Develop: add the “more” part. Stretch: link two answers with ‏</a:t>
             </a:r>
             <a:pPr algn="l" indent="0" marL="0">
               <a:buNone/>
@@ -7463,7 +7463,7 @@
                 <a:latin typeface="Calibri" pitchFamily="34" charset="0"/>
                 <a:cs typeface="Amiri" pitchFamily="2" charset="-78"/>
               </a:rPr>
-              <a:t>, </a:t>
+              <a:t>‏, ‏</a:t>
             </a:r>
             <a:pPr algn="l" indent="0" marL="0">
               <a:buNone/>
@@ -7490,7 +7490,7 @@
                 <a:latin typeface="Calibri" pitchFamily="34" charset="0"/>
                 <a:cs typeface="Amiri" pitchFamily="2" charset="-78"/>
               </a:rPr>
-              <a:t> or </a:t>
+              <a:t>‏ or ‏</a:t>
             </a:r>
             <a:pPr algn="l" indent="0" marL="0">
               <a:buNone/>
@@ -7517,7 +7517,7 @@
                 <a:latin typeface="Calibri" pitchFamily="34" charset="0"/>
                 <a:cs typeface="Amiri" pitchFamily="2" charset="-78"/>
               </a:rPr>
-              <a:t>. Swap after each question.</a:t>
+              <a:t>‏. Swap after each question.</a:t>
             </a:r>
             <a:endParaRPr lang="en-US" sz="1100" dirty="0"/>
           </a:p>
@@ -10840,7 +10840,7 @@
                 <a:latin typeface="Calibri" pitchFamily="34" charset="0"/>
                 <a:cs typeface="Amiri" pitchFamily="2" charset="-78"/>
               </a:rPr>
-              <a:t>Add </a:t>
+              <a:t>Add ‏</a:t>
             </a:r>
             <a:pPr algn="l" indent="0" marL="0">
               <a:buNone/>
@@ -10867,7 +10867,7 @@
                 <a:latin typeface="Calibri" pitchFamily="34" charset="0"/>
                 <a:cs typeface="Amiri" pitchFamily="2" charset="-78"/>
               </a:rPr>
-              <a:t> … and the total (</a:t>
+              <a:t> …‏ and the total (‏</a:t>
             </a:r>
             <a:pPr algn="l" indent="0" marL="0">
               <a:buNone/>
@@ -10894,7 +10894,7 @@
                 <a:latin typeface="Calibri" pitchFamily="34" charset="0"/>
                 <a:cs typeface="Amiri" pitchFamily="2" charset="-78"/>
               </a:rPr>
-              <a:t> …).</a:t>
+              <a:t> …‏).</a:t>
             </a:r>
             <a:endParaRPr lang="en-US" sz="1150" dirty="0"/>
           </a:p>
@@ -11031,7 +11031,7 @@
                 <a:latin typeface="Calibri" pitchFamily="34" charset="0"/>
                 <a:cs typeface="Amiri" pitchFamily="2" charset="-78"/>
               </a:rPr>
-              <a:t>Add your opinion: </a:t>
+              <a:t>Add your opinion: ‏</a:t>
             </a:r>
             <a:pPr algn="l" indent="0" marL="0">
               <a:buNone/>
@@ -11058,7 +11058,7 @@
                 <a:latin typeface="Calibri" pitchFamily="34" charset="0"/>
                 <a:cs typeface="Amiri" pitchFamily="2" charset="-78"/>
               </a:rPr>
-              <a:t> — and a polite request you use there.</a:t>
+              <a:t>‏ — and a polite request you use there.</a:t>
             </a:r>
             <a:endParaRPr lang="en-US" sz="1150" dirty="0"/>
           </a:p>
@@ -17433,7 +17433,7 @@
                 <a:latin typeface="Calibri" pitchFamily="34" charset="0"/>
                 <a:cs typeface="Amiri" pitchFamily="2" charset="-78"/>
               </a:rPr>
-              <a:t>Object → -an: </a:t>
+              <a:t>Object → -an: ‏</a:t>
             </a:r>
             <a:pPr algn="l" indent="0" marL="0">
               <a:buNone/>
@@ -17460,7 +17460,7 @@
                 <a:latin typeface="Calibri" pitchFamily="34" charset="0"/>
                 <a:cs typeface="Amiri" pitchFamily="2" charset="-78"/>
               </a:rPr>
-              <a:t>.</a:t>
+              <a:t>‏.</a:t>
             </a:r>
             <a:endParaRPr lang="en-US" sz="1150" dirty="0"/>
           </a:p>
@@ -17671,7 +17671,7 @@
                 <a:latin typeface="Calibri" pitchFamily="34" charset="0"/>
                 <a:cs typeface="Amiri" pitchFamily="2" charset="-78"/>
               </a:rPr>
-              <a:t>3–10 → plural genitive: </a:t>
+              <a:t>3–10 → plural genitive: ‏</a:t>
             </a:r>
             <a:pPr algn="l" indent="0" marL="0">
               <a:buNone/>
@@ -17698,7 +17698,7 @@
                 <a:latin typeface="Calibri" pitchFamily="34" charset="0"/>
                 <a:cs typeface="Amiri" pitchFamily="2" charset="-78"/>
               </a:rPr>
-              <a:t>.</a:t>
+              <a:t>‏.</a:t>
             </a:r>
             <a:endParaRPr lang="en-US" sz="1150" dirty="0"/>
           </a:p>
@@ -17902,6 +17902,19 @@
               <a:buNone/>
             </a:pPr>
             <a:r>
+              <a:rPr lang="en-US" sz="1150" b="1" dirty="0">
+                <a:solidFill>
+                  <a:srgbClr val="1B3B6F"/>
+                </a:solidFill>
+                <a:latin typeface="Calibri" pitchFamily="34" charset="0"/>
+                <a:cs typeface="Amiri" pitchFamily="2" charset="-78"/>
+              </a:rPr>
+              <a:t>‏</a:t>
+            </a:r>
+            <a:pPr algn="l" indent="0" marL="0">
+              <a:buNone/>
+            </a:pPr>
+            <a:r>
               <a:rPr lang="ar-SA" altLang="en-US" sz="1500" b="1" dirty="0">
                 <a:solidFill>
                   <a:srgbClr val="1B3B6F"/>
@@ -17923,7 +17936,7 @@
                 <a:latin typeface="Calibri" pitchFamily="34" charset="0"/>
                 <a:cs typeface="Amiri" pitchFamily="2" charset="-78"/>
               </a:rPr>
-              <a:t> + noun in genitive (iḍāfa).</a:t>
+              <a:t>‏ + noun in genitive (iḍāfa).</a:t>
             </a:r>
             <a:endParaRPr lang="en-US" sz="1150" dirty="0"/>
           </a:p>
@@ -20123,7 +20136,7 @@
                 <a:latin typeface="Calibri" pitchFamily="34" charset="0"/>
                 <a:cs typeface="Amiri" pitchFamily="2" charset="-78"/>
               </a:rPr>
-              <a:t>☐  At least one </a:t>
+              <a:t>☐  At least one ‏</a:t>
             </a:r>
             <a:pPr algn="l" indent="0" marL="0">
               <a:buNone/>
@@ -20150,7 +20163,7 @@
                 <a:latin typeface="Calibri" pitchFamily="34" charset="0"/>
                 <a:cs typeface="Amiri" pitchFamily="2" charset="-78"/>
               </a:rPr>
-              <a:t> and one </a:t>
+              <a:t>‏ and one ‏</a:t>
             </a:r>
             <a:pPr algn="l" indent="0" marL="0">
               <a:buNone/>
@@ -20177,7 +20190,7 @@
                 <a:latin typeface="Calibri" pitchFamily="34" charset="0"/>
                 <a:cs typeface="Amiri" pitchFamily="2" charset="-78"/>
               </a:rPr>
-              <a:t> (Develop).</a:t>
+              <a:t>‏ (Develop).</a:t>
             </a:r>
             <a:endParaRPr lang="en-US" sz="1200" dirty="0"/>
           </a:p>
@@ -23501,7 +23514,7 @@
                 <a:latin typeface="Calibri" pitchFamily="34" charset="0"/>
                 <a:cs typeface="Amiri" pitchFamily="2" charset="-78"/>
               </a:rPr>
-              <a:t>order politely with </a:t>
+              <a:t>order politely with ‏</a:t>
             </a:r>
             <a:pPr algn="l" indent="0" marL="0">
               <a:buNone/>
@@ -23528,7 +23541,7 @@
                 <a:latin typeface="Calibri" pitchFamily="34" charset="0"/>
                 <a:cs typeface="Amiri" pitchFamily="2" charset="-78"/>
               </a:rPr>
-              <a:t>?</a:t>
+              <a:t>‏?</a:t>
             </a:r>
             <a:endParaRPr lang="en-US" sz="1100" dirty="0"/>
           </a:p>
@@ -23752,7 +23765,7 @@
                 <a:latin typeface="Calibri" pitchFamily="34" charset="0"/>
                 <a:cs typeface="Amiri" pitchFamily="2" charset="-78"/>
               </a:rPr>
-              <a:t>use numbers + </a:t>
+              <a:t>use numbers + ‏</a:t>
             </a:r>
             <a:pPr algn="l" indent="0" marL="0">
               <a:buNone/>
@@ -23779,7 +23792,7 @@
                 <a:latin typeface="Calibri" pitchFamily="34" charset="0"/>
                 <a:cs typeface="Amiri" pitchFamily="2" charset="-78"/>
               </a:rPr>
-              <a:t> correctly and </a:t>
+              <a:t>‏ correctly and ‏</a:t>
             </a:r>
             <a:pPr algn="l" indent="0" marL="0">
               <a:buNone/>
@@ -23806,7 +23819,7 @@
                 <a:latin typeface="Calibri" pitchFamily="34" charset="0"/>
                 <a:cs typeface="Amiri" pitchFamily="2" charset="-78"/>
               </a:rPr>
-              <a:t>?</a:t>
+              <a:t>‏?</a:t>
             </a:r>
             <a:endParaRPr lang="en-US" sz="1100" dirty="0"/>
           </a:p>
@@ -23965,7 +23978,7 @@
                 <a:latin typeface="Calibri" pitchFamily="34" charset="0"/>
                 <a:cs typeface="Amiri" pitchFamily="2" charset="-78"/>
               </a:rPr>
-              <a:t>use linking words (</a:t>
+              <a:t>use linking words (‏</a:t>
             </a:r>
             <a:pPr algn="l" indent="0" marL="0">
               <a:buNone/>
@@ -24073,7 +24086,7 @@
                 <a:latin typeface="Calibri" pitchFamily="34" charset="0"/>
                 <a:cs typeface="Amiri" pitchFamily="2" charset="-78"/>
               </a:rPr>
-              <a:t>)?</a:t>
+              <a:t>‏)?</a:t>
             </a:r>
             <a:endParaRPr lang="en-US" sz="1100" dirty="0"/>
           </a:p>
@@ -28019,7 +28032,7 @@
                 <a:latin typeface="Calibri" pitchFamily="34" charset="0"/>
                 <a:cs typeface="Amiri" pitchFamily="2" charset="-78"/>
               </a:rPr>
-              <a:t>I added reasons (</a:t>
+              <a:t>I added reasons (‏</a:t>
             </a:r>
             <a:pPr algn="l" indent="0" marL="0">
               <a:buNone/>
@@ -28046,7 +28059,7 @@
                 <a:latin typeface="Calibri" pitchFamily="34" charset="0"/>
                 <a:cs typeface="Amiri" pitchFamily="2" charset="-78"/>
               </a:rPr>
-              <a:t>) and extra details without frames.</a:t>
+              <a:t>‏) and extra details without frames.</a:t>
             </a:r>
             <a:endParaRPr lang="en-US" sz="1300" dirty="0"/>
           </a:p>
@@ -32174,7 +32187,7 @@
                 <a:latin typeface="Calibri" pitchFamily="34" charset="0"/>
                 <a:cs typeface="Amiri" pitchFamily="2" charset="-78"/>
               </a:rPr>
-              <a:t>☐  Add a reason (</a:t>
+              <a:t>☐  Add a reason (‏</a:t>
             </a:r>
             <a:pPr algn="l" indent="0" marL="0">
               <a:buNone/>
@@ -32201,7 +32214,7 @@
                 <a:latin typeface="Calibri" pitchFamily="34" charset="0"/>
                 <a:cs typeface="Amiri" pitchFamily="2" charset="-78"/>
               </a:rPr>
-              <a:t>) and an extra detail to every point.</a:t>
+              <a:t>‏) and an extra detail to every point.</a:t>
             </a:r>
             <a:endParaRPr lang="en-US" sz="1300" dirty="0"/>
           </a:p>
@@ -33722,7 +33735,7 @@
                 <a:latin typeface="Calibri" pitchFamily="34" charset="0"/>
                 <a:cs typeface="Amiri" pitchFamily="2" charset="-78"/>
               </a:rPr>
-              <a:t>Join a word from each lesson in one sentence with </a:t>
+              <a:t>Join a word from each lesson in one sentence with ‏</a:t>
             </a:r>
             <a:pPr algn="l" indent="0" marL="0">
               <a:buNone/>
@@ -33749,7 +33762,7 @@
                 <a:latin typeface="Calibri" pitchFamily="34" charset="0"/>
                 <a:cs typeface="Amiri" pitchFamily="2" charset="-78"/>
               </a:rPr>
-              <a:t> or </a:t>
+              <a:t>‏ or ‏</a:t>
             </a:r>
             <a:pPr algn="l" indent="0" marL="0">
               <a:buNone/>
@@ -33776,7 +33789,7 @@
                 <a:latin typeface="Calibri" pitchFamily="34" charset="0"/>
                 <a:cs typeface="Amiri" pitchFamily="2" charset="-78"/>
               </a:rPr>
-              <a:t>.</a:t>
+              <a:t>‏.</a:t>
             </a:r>
             <a:endParaRPr lang="en-US" sz="1150" dirty="0"/>
           </a:p>
